--- a/2DGP 2차 발표.pptx
+++ b/2DGP 2차 발표.pptx
@@ -16,11 +16,11 @@
   <p:notesSz cx="6858000" cy="9144000"/>
   <p:embeddedFontLst>
     <p:embeddedFont>
-      <p:font typeface="둥근모꼴" panose="020B0500000000000000" pitchFamily="50" charset="-127"/>
+      <p:font typeface="Aa카시오페아" panose="02020603020101020101" pitchFamily="18" charset="-127"/>
       <p:regular r:id="rId6"/>
     </p:embeddedFont>
     <p:embeddedFont>
-      <p:font typeface="Aa카시오페아" panose="02020603020101020101" pitchFamily="18" charset="-127"/>
+      <p:font typeface="둥근모꼴" panose="020B0500000000000000" pitchFamily="50" charset="-127"/>
       <p:regular r:id="rId7"/>
     </p:embeddedFont>
     <p:embeddedFont>
@@ -1485,7 +1485,7 @@
           <a:p>
             <a:fld id="{5A79C9A3-EE38-4178-B66C-C9E0DD2AD668}" type="datetimeFigureOut">
               <a:rPr lang="ko-KR" altLang="en-US" smtClean="0"/>
-              <a:t>2025-11-11</a:t>
+              <a:t>2025-11-12</a:t>
             </a:fld>
             <a:endParaRPr lang="ko-KR" altLang="en-US"/>
           </a:p>
@@ -1983,7 +1983,7 @@
           <a:p>
             <a:fld id="{327C4B2F-906D-49BE-A6D7-9201BB4F9B77}" type="datetimeFigureOut">
               <a:rPr lang="ko-KR" altLang="en-US" smtClean="0"/>
-              <a:t>2025-11-11</a:t>
+              <a:t>2025-11-12</a:t>
             </a:fld>
             <a:endParaRPr lang="ko-KR" altLang="en-US"/>
           </a:p>
@@ -2181,7 +2181,7 @@
           <a:p>
             <a:fld id="{327C4B2F-906D-49BE-A6D7-9201BB4F9B77}" type="datetimeFigureOut">
               <a:rPr lang="ko-KR" altLang="en-US" smtClean="0"/>
-              <a:t>2025-11-11</a:t>
+              <a:t>2025-11-12</a:t>
             </a:fld>
             <a:endParaRPr lang="ko-KR" altLang="en-US"/>
           </a:p>
@@ -2389,7 +2389,7 @@
           <a:p>
             <a:fld id="{327C4B2F-906D-49BE-A6D7-9201BB4F9B77}" type="datetimeFigureOut">
               <a:rPr lang="ko-KR" altLang="en-US" smtClean="0"/>
-              <a:t>2025-11-11</a:t>
+              <a:t>2025-11-12</a:t>
             </a:fld>
             <a:endParaRPr lang="ko-KR" altLang="en-US"/>
           </a:p>
@@ -2587,7 +2587,7 @@
           <a:p>
             <a:fld id="{327C4B2F-906D-49BE-A6D7-9201BB4F9B77}" type="datetimeFigureOut">
               <a:rPr lang="ko-KR" altLang="en-US" smtClean="0"/>
-              <a:t>2025-11-11</a:t>
+              <a:t>2025-11-12</a:t>
             </a:fld>
             <a:endParaRPr lang="ko-KR" altLang="en-US"/>
           </a:p>
@@ -2862,7 +2862,7 @@
           <a:p>
             <a:fld id="{327C4B2F-906D-49BE-A6D7-9201BB4F9B77}" type="datetimeFigureOut">
               <a:rPr lang="ko-KR" altLang="en-US" smtClean="0"/>
-              <a:t>2025-11-11</a:t>
+              <a:t>2025-11-12</a:t>
             </a:fld>
             <a:endParaRPr lang="ko-KR" altLang="en-US"/>
           </a:p>
@@ -3127,7 +3127,7 @@
           <a:p>
             <a:fld id="{327C4B2F-906D-49BE-A6D7-9201BB4F9B77}" type="datetimeFigureOut">
               <a:rPr lang="ko-KR" altLang="en-US" smtClean="0"/>
-              <a:t>2025-11-11</a:t>
+              <a:t>2025-11-12</a:t>
             </a:fld>
             <a:endParaRPr lang="ko-KR" altLang="en-US"/>
           </a:p>
@@ -3539,7 +3539,7 @@
           <a:p>
             <a:fld id="{327C4B2F-906D-49BE-A6D7-9201BB4F9B77}" type="datetimeFigureOut">
               <a:rPr lang="ko-KR" altLang="en-US" smtClean="0"/>
-              <a:t>2025-11-11</a:t>
+              <a:t>2025-11-12</a:t>
             </a:fld>
             <a:endParaRPr lang="ko-KR" altLang="en-US"/>
           </a:p>
@@ -3680,7 +3680,7 @@
           <a:p>
             <a:fld id="{327C4B2F-906D-49BE-A6D7-9201BB4F9B77}" type="datetimeFigureOut">
               <a:rPr lang="ko-KR" altLang="en-US" smtClean="0"/>
-              <a:t>2025-11-11</a:t>
+              <a:t>2025-11-12</a:t>
             </a:fld>
             <a:endParaRPr lang="ko-KR" altLang="en-US"/>
           </a:p>
@@ -3793,7 +3793,7 @@
           <a:p>
             <a:fld id="{327C4B2F-906D-49BE-A6D7-9201BB4F9B77}" type="datetimeFigureOut">
               <a:rPr lang="ko-KR" altLang="en-US" smtClean="0"/>
-              <a:t>2025-11-11</a:t>
+              <a:t>2025-11-12</a:t>
             </a:fld>
             <a:endParaRPr lang="ko-KR" altLang="en-US"/>
           </a:p>
@@ -4104,7 +4104,7 @@
           <a:p>
             <a:fld id="{327C4B2F-906D-49BE-A6D7-9201BB4F9B77}" type="datetimeFigureOut">
               <a:rPr lang="ko-KR" altLang="en-US" smtClean="0"/>
-              <a:t>2025-11-11</a:t>
+              <a:t>2025-11-12</a:t>
             </a:fld>
             <a:endParaRPr lang="ko-KR" altLang="en-US"/>
           </a:p>
@@ -4392,7 +4392,7 @@
           <a:p>
             <a:fld id="{327C4B2F-906D-49BE-A6D7-9201BB4F9B77}" type="datetimeFigureOut">
               <a:rPr lang="ko-KR" altLang="en-US" smtClean="0"/>
-              <a:t>2025-11-11</a:t>
+              <a:t>2025-11-12</a:t>
             </a:fld>
             <a:endParaRPr lang="ko-KR" altLang="en-US"/>
           </a:p>
@@ -4633,7 +4633,7 @@
           <a:p>
             <a:fld id="{327C4B2F-906D-49BE-A6D7-9201BB4F9B77}" type="datetimeFigureOut">
               <a:rPr lang="ko-KR" altLang="en-US" smtClean="0"/>
-              <a:t>2025-11-11</a:t>
+              <a:t>2025-11-12</a:t>
             </a:fld>
             <a:endParaRPr lang="ko-KR" altLang="en-US"/>
           </a:p>
@@ -7233,36 +7233,6 @@
           <a:chExt cx="0" cy="0"/>
         </a:xfrm>
       </p:grpSpPr>
-      <p:pic>
-        <p:nvPicPr>
-          <p:cNvPr id="5" name="그림 4">
-            <a:extLst>
-              <a:ext uri="{FF2B5EF4-FFF2-40B4-BE49-F238E27FC236}">
-                <a16:creationId xmlns:a16="http://schemas.microsoft.com/office/drawing/2014/main" id="{768D4E63-8AEF-8D49-0FAC-C4F1D39ECFD4}"/>
-              </a:ext>
-            </a:extLst>
-          </p:cNvPr>
-          <p:cNvPicPr>
-            <a:picLocks noChangeAspect="1"/>
-          </p:cNvPicPr>
-          <p:nvPr/>
-        </p:nvPicPr>
-        <p:blipFill>
-          <a:blip r:embed="rId2"/>
-          <a:stretch>
-            <a:fillRect/>
-          </a:stretch>
-        </p:blipFill>
-        <p:spPr>
-          <a:xfrm>
-            <a:off x="1709273" y="825451"/>
-            <a:ext cx="8526927" cy="5715682"/>
-          </a:xfrm>
-          <a:prstGeom prst="rect">
-            <a:avLst/>
-          </a:prstGeom>
-        </p:spPr>
-      </p:pic>
       <p:sp>
         <p:nvSpPr>
           <p:cNvPr id="6" name="TextBox 5">
@@ -7356,6 +7326,36 @@
           </a:fontRef>
         </p:style>
       </p:cxnSp>
+      <p:pic>
+        <p:nvPicPr>
+          <p:cNvPr id="3" name="그림 2">
+            <a:extLst>
+              <a:ext uri="{FF2B5EF4-FFF2-40B4-BE49-F238E27FC236}">
+                <a16:creationId xmlns:a16="http://schemas.microsoft.com/office/drawing/2014/main" id="{7718EE50-76F2-DEA4-6D9C-FAED6A097E64}"/>
+              </a:ext>
+            </a:extLst>
+          </p:cNvPr>
+          <p:cNvPicPr>
+            <a:picLocks noChangeAspect="1"/>
+          </p:cNvPicPr>
+          <p:nvPr/>
+        </p:nvPicPr>
+        <p:blipFill>
+          <a:blip r:embed="rId2"/>
+          <a:stretch>
+            <a:fillRect/>
+          </a:stretch>
+        </p:blipFill>
+        <p:spPr>
+          <a:xfrm>
+            <a:off x="1902401" y="1059935"/>
+            <a:ext cx="8164389" cy="5207098"/>
+          </a:xfrm>
+          <a:prstGeom prst="rect">
+            <a:avLst/>
+          </a:prstGeom>
+        </p:spPr>
+      </p:pic>
     </p:spTree>
     <p:extLst>
       <p:ext uri="{BB962C8B-B14F-4D97-AF65-F5344CB8AC3E}">
